--- a/docs/lesson/6.1-mth361-conditional-probability-and-bayes-theorem/balls-in-jars.pptx
+++ b/docs/lesson/6.1-mth361-conditional-probability-and-bayes-theorem/balls-in-jars.pptx
@@ -246,7 +246,7 @@
           <a:p>
             <a:fld id="{7AE11E9A-BD26-442F-8BB6-C4E3A92D38F1}" type="datetimeFigureOut">
               <a:rPr lang="en-US" smtClean="0"/>
-              <a:t>3/19/2026</a:t>
+              <a:t>3/22/2026</a:t>
             </a:fld>
             <a:endParaRPr lang="en-US"/>
           </a:p>
@@ -416,7 +416,7 @@
           <a:p>
             <a:fld id="{7AE11E9A-BD26-442F-8BB6-C4E3A92D38F1}" type="datetimeFigureOut">
               <a:rPr lang="en-US" smtClean="0"/>
-              <a:t>3/19/2026</a:t>
+              <a:t>3/22/2026</a:t>
             </a:fld>
             <a:endParaRPr lang="en-US"/>
           </a:p>
@@ -596,7 +596,7 @@
           <a:p>
             <a:fld id="{7AE11E9A-BD26-442F-8BB6-C4E3A92D38F1}" type="datetimeFigureOut">
               <a:rPr lang="en-US" smtClean="0"/>
-              <a:t>3/19/2026</a:t>
+              <a:t>3/22/2026</a:t>
             </a:fld>
             <a:endParaRPr lang="en-US"/>
           </a:p>
@@ -766,7 +766,7 @@
           <a:p>
             <a:fld id="{7AE11E9A-BD26-442F-8BB6-C4E3A92D38F1}" type="datetimeFigureOut">
               <a:rPr lang="en-US" smtClean="0"/>
-              <a:t>3/19/2026</a:t>
+              <a:t>3/22/2026</a:t>
             </a:fld>
             <a:endParaRPr lang="en-US"/>
           </a:p>
@@ -1012,7 +1012,7 @@
           <a:p>
             <a:fld id="{7AE11E9A-BD26-442F-8BB6-C4E3A92D38F1}" type="datetimeFigureOut">
               <a:rPr lang="en-US" smtClean="0"/>
-              <a:t>3/19/2026</a:t>
+              <a:t>3/22/2026</a:t>
             </a:fld>
             <a:endParaRPr lang="en-US"/>
           </a:p>
@@ -1244,7 +1244,7 @@
           <a:p>
             <a:fld id="{7AE11E9A-BD26-442F-8BB6-C4E3A92D38F1}" type="datetimeFigureOut">
               <a:rPr lang="en-US" smtClean="0"/>
-              <a:t>3/19/2026</a:t>
+              <a:t>3/22/2026</a:t>
             </a:fld>
             <a:endParaRPr lang="en-US"/>
           </a:p>
@@ -1611,7 +1611,7 @@
           <a:p>
             <a:fld id="{7AE11E9A-BD26-442F-8BB6-C4E3A92D38F1}" type="datetimeFigureOut">
               <a:rPr lang="en-US" smtClean="0"/>
-              <a:t>3/19/2026</a:t>
+              <a:t>3/22/2026</a:t>
             </a:fld>
             <a:endParaRPr lang="en-US"/>
           </a:p>
@@ -1729,7 +1729,7 @@
           <a:p>
             <a:fld id="{7AE11E9A-BD26-442F-8BB6-C4E3A92D38F1}" type="datetimeFigureOut">
               <a:rPr lang="en-US" smtClean="0"/>
-              <a:t>3/19/2026</a:t>
+              <a:t>3/22/2026</a:t>
             </a:fld>
             <a:endParaRPr lang="en-US"/>
           </a:p>
@@ -1824,7 +1824,7 @@
           <a:p>
             <a:fld id="{7AE11E9A-BD26-442F-8BB6-C4E3A92D38F1}" type="datetimeFigureOut">
               <a:rPr lang="en-US" smtClean="0"/>
-              <a:t>3/19/2026</a:t>
+              <a:t>3/22/2026</a:t>
             </a:fld>
             <a:endParaRPr lang="en-US"/>
           </a:p>
@@ -2101,7 +2101,7 @@
           <a:p>
             <a:fld id="{7AE11E9A-BD26-442F-8BB6-C4E3A92D38F1}" type="datetimeFigureOut">
               <a:rPr lang="en-US" smtClean="0"/>
-              <a:t>3/19/2026</a:t>
+              <a:t>3/22/2026</a:t>
             </a:fld>
             <a:endParaRPr lang="en-US"/>
           </a:p>
@@ -2358,7 +2358,7 @@
           <a:p>
             <a:fld id="{7AE11E9A-BD26-442F-8BB6-C4E3A92D38F1}" type="datetimeFigureOut">
               <a:rPr lang="en-US" smtClean="0"/>
-              <a:t>3/19/2026</a:t>
+              <a:t>3/22/2026</a:t>
             </a:fld>
             <a:endParaRPr lang="en-US"/>
           </a:p>
@@ -2571,7 +2571,7 @@
           <a:p>
             <a:fld id="{7AE11E9A-BD26-442F-8BB6-C4E3A92D38F1}" type="datetimeFigureOut">
               <a:rPr lang="en-US" smtClean="0"/>
-              <a:t>3/19/2026</a:t>
+              <a:t>3/22/2026</a:t>
             </a:fld>
             <a:endParaRPr lang="en-US"/>
           </a:p>
@@ -3128,7 +3128,10 @@
                       <m:sSub>
                         <m:sSubPr>
                           <m:ctrlPr>
-                            <a:rPr lang="en-US" sz="4000" b="1" i="1">
+                            <a:rPr lang="en-US" sz="4000" b="1" i="1" smtClean="0">
+                              <a:solidFill>
+                                <a:srgbClr val="C00000"/>
+                              </a:solidFill>
                               <a:latin typeface="Cambria Math" panose="02040503050406030204" pitchFamily="18" charset="0"/>
                             </a:rPr>
                           </m:ctrlPr>
@@ -3136,6 +3139,9 @@
                         <m:e>
                           <m:r>
                             <a:rPr lang="en-US" sz="4000" b="1" i="1">
+                              <a:solidFill>
+                                <a:srgbClr val="C00000"/>
+                              </a:solidFill>
                               <a:latin typeface="Cambria Math" panose="02040503050406030204" pitchFamily="18" charset="0"/>
                             </a:rPr>
                             <m:t>𝑱</m:t>
@@ -3144,6 +3150,9 @@
                         <m:sub>
                           <m:r>
                             <a:rPr lang="en-US" sz="4000" b="1" i="1">
+                              <a:solidFill>
+                                <a:srgbClr val="C00000"/>
+                              </a:solidFill>
                               <a:latin typeface="Cambria Math" panose="02040503050406030204" pitchFamily="18" charset="0"/>
                             </a:rPr>
                             <m:t>𝟏</m:t>
@@ -5095,7 +5104,10 @@
                       <m:sSub>
                         <m:sSubPr>
                           <m:ctrlPr>
-                            <a:rPr lang="en-US" sz="4000" b="1" i="1">
+                            <a:rPr lang="en-US" sz="4000" b="1" i="1" smtClean="0">
+                              <a:solidFill>
+                                <a:srgbClr val="FFC000"/>
+                              </a:solidFill>
                               <a:latin typeface="Cambria Math" panose="02040503050406030204" pitchFamily="18" charset="0"/>
                             </a:rPr>
                           </m:ctrlPr>
@@ -5103,6 +5115,9 @@
                         <m:e>
                           <m:r>
                             <a:rPr lang="en-US" sz="4000" b="1" i="1">
+                              <a:solidFill>
+                                <a:srgbClr val="FFC000"/>
+                              </a:solidFill>
                               <a:latin typeface="Cambria Math" panose="02040503050406030204" pitchFamily="18" charset="0"/>
                             </a:rPr>
                             <m:t>𝑱</m:t>
@@ -5111,6 +5126,9 @@
                         <m:sub>
                           <m:r>
                             <a:rPr lang="en-US" sz="4000" b="1" i="1">
+                              <a:solidFill>
+                                <a:srgbClr val="FFC000"/>
+                              </a:solidFill>
                               <a:latin typeface="Cambria Math" panose="02040503050406030204" pitchFamily="18" charset="0"/>
                             </a:rPr>
                             <m:t>𝟐</m:t>
@@ -6826,7 +6844,10 @@
                       <m:sSub>
                         <m:sSubPr>
                           <m:ctrlPr>
-                            <a:rPr lang="en-US" sz="4000" b="1" i="1">
+                            <a:rPr lang="en-US" sz="4000" b="1" i="1" smtClean="0">
+                              <a:solidFill>
+                                <a:srgbClr val="C00000"/>
+                              </a:solidFill>
                               <a:latin typeface="Cambria Math" panose="02040503050406030204" pitchFamily="18" charset="0"/>
                             </a:rPr>
                           </m:ctrlPr>
@@ -6834,6 +6855,9 @@
                         <m:e>
                           <m:r>
                             <a:rPr lang="en-US" sz="4000" b="1" i="1">
+                              <a:solidFill>
+                                <a:srgbClr val="C00000"/>
+                              </a:solidFill>
                               <a:latin typeface="Cambria Math" panose="02040503050406030204" pitchFamily="18" charset="0"/>
                             </a:rPr>
                             <m:t>𝑱</m:t>
@@ -6842,6 +6866,9 @@
                         <m:sub>
                           <m:r>
                             <a:rPr lang="en-US" sz="4000" b="1" i="1">
+                              <a:solidFill>
+                                <a:srgbClr val="C00000"/>
+                              </a:solidFill>
                               <a:latin typeface="Cambria Math" panose="02040503050406030204" pitchFamily="18" charset="0"/>
                             </a:rPr>
                             <m:t>𝟏</m:t>
@@ -8572,7 +8599,10 @@
                       <m:sSub>
                         <m:sSubPr>
                           <m:ctrlPr>
-                            <a:rPr lang="en-US" sz="4000" b="1" i="1">
+                            <a:rPr lang="en-US" sz="4000" b="1" i="1" smtClean="0">
+                              <a:solidFill>
+                                <a:srgbClr val="FFC000"/>
+                              </a:solidFill>
                               <a:latin typeface="Cambria Math" panose="02040503050406030204" pitchFamily="18" charset="0"/>
                             </a:rPr>
                           </m:ctrlPr>
@@ -8580,6 +8610,9 @@
                         <m:e>
                           <m:r>
                             <a:rPr lang="en-US" sz="4000" b="1" i="1">
+                              <a:solidFill>
+                                <a:srgbClr val="FFC000"/>
+                              </a:solidFill>
                               <a:latin typeface="Cambria Math" panose="02040503050406030204" pitchFamily="18" charset="0"/>
                             </a:rPr>
                             <m:t>𝑱</m:t>
@@ -8588,6 +8621,9 @@
                         <m:sub>
                           <m:r>
                             <a:rPr lang="en-US" sz="4000" b="1" i="1">
+                              <a:solidFill>
+                                <a:srgbClr val="FFC000"/>
+                              </a:solidFill>
                               <a:latin typeface="Cambria Math" panose="02040503050406030204" pitchFamily="18" charset="0"/>
                             </a:rPr>
                             <m:t>𝟐</m:t>
@@ -10296,7 +10332,10 @@
                       <m:sSub>
                         <m:sSubPr>
                           <m:ctrlPr>
-                            <a:rPr lang="en-US" sz="4000" b="1" i="1">
+                            <a:rPr lang="en-US" sz="4000" b="1" i="1" smtClean="0">
+                              <a:solidFill>
+                                <a:srgbClr val="C00000"/>
+                              </a:solidFill>
                               <a:latin typeface="Cambria Math" panose="02040503050406030204" pitchFamily="18" charset="0"/>
                             </a:rPr>
                           </m:ctrlPr>
@@ -10304,6 +10343,9 @@
                         <m:e>
                           <m:r>
                             <a:rPr lang="en-US" sz="4000" b="1" i="1">
+                              <a:solidFill>
+                                <a:srgbClr val="C00000"/>
+                              </a:solidFill>
                               <a:latin typeface="Cambria Math" panose="02040503050406030204" pitchFamily="18" charset="0"/>
                             </a:rPr>
                             <m:t>𝑱</m:t>
@@ -10312,6 +10354,9 @@
                         <m:sub>
                           <m:r>
                             <a:rPr lang="en-US" sz="4000" b="1" i="1">
+                              <a:solidFill>
+                                <a:srgbClr val="C00000"/>
+                              </a:solidFill>
                               <a:latin typeface="Cambria Math" panose="02040503050406030204" pitchFamily="18" charset="0"/>
                             </a:rPr>
                             <m:t>𝟏</m:t>
@@ -12268,7 +12313,10 @@
                       <m:sSub>
                         <m:sSubPr>
                           <m:ctrlPr>
-                            <a:rPr lang="en-US" sz="4000" b="1" i="1">
+                            <a:rPr lang="en-US" sz="4000" b="1" i="1" smtClean="0">
+                              <a:solidFill>
+                                <a:srgbClr val="FFC000"/>
+                              </a:solidFill>
                               <a:latin typeface="Cambria Math" panose="02040503050406030204" pitchFamily="18" charset="0"/>
                             </a:rPr>
                           </m:ctrlPr>
@@ -12276,6 +12324,9 @@
                         <m:e>
                           <m:r>
                             <a:rPr lang="en-US" sz="4000" b="1" i="1">
+                              <a:solidFill>
+                                <a:srgbClr val="FFC000"/>
+                              </a:solidFill>
                               <a:latin typeface="Cambria Math" panose="02040503050406030204" pitchFamily="18" charset="0"/>
                             </a:rPr>
                             <m:t>𝑱</m:t>
@@ -12284,6 +12335,9 @@
                         <m:sub>
                           <m:r>
                             <a:rPr lang="en-US" sz="4000" b="1" i="1">
+                              <a:solidFill>
+                                <a:srgbClr val="FFC000"/>
+                              </a:solidFill>
                               <a:latin typeface="Cambria Math" panose="02040503050406030204" pitchFamily="18" charset="0"/>
                             </a:rPr>
                             <m:t>𝟐</m:t>
@@ -14054,7 +14108,10 @@
                       <m:sSub>
                         <m:sSubPr>
                           <m:ctrlPr>
-                            <a:rPr lang="en-US" sz="4000" b="1" i="1">
+                            <a:rPr lang="en-US" sz="4000" b="1" i="1" smtClean="0">
+                              <a:solidFill>
+                                <a:srgbClr val="C00000"/>
+                              </a:solidFill>
                               <a:latin typeface="Cambria Math" panose="02040503050406030204" pitchFamily="18" charset="0"/>
                             </a:rPr>
                           </m:ctrlPr>
@@ -14062,6 +14119,9 @@
                         <m:e>
                           <m:r>
                             <a:rPr lang="en-US" sz="4000" b="1" i="1">
+                              <a:solidFill>
+                                <a:srgbClr val="C00000"/>
+                              </a:solidFill>
                               <a:latin typeface="Cambria Math" panose="02040503050406030204" pitchFamily="18" charset="0"/>
                             </a:rPr>
                             <m:t>𝑱</m:t>
@@ -14070,6 +14130,9 @@
                         <m:sub>
                           <m:r>
                             <a:rPr lang="en-US" sz="4000" b="1" i="1">
+                              <a:solidFill>
+                                <a:srgbClr val="C00000"/>
+                              </a:solidFill>
                               <a:latin typeface="Cambria Math" panose="02040503050406030204" pitchFamily="18" charset="0"/>
                             </a:rPr>
                             <m:t>𝟏</m:t>
@@ -14185,7 +14248,14 @@
           <a:lstStyle/>
           <a:p>
             <a:pPr algn="ctr"/>
-            <a:endParaRPr lang="en-US"/>
+            <a:r>
+              <a:rPr lang="en-US" sz="3200" b="1" dirty="0">
+                <a:solidFill>
+                  <a:schemeClr val="tx1"/>
+                </a:solidFill>
+              </a:rPr>
+              <a:t>G</a:t>
+            </a:r>
           </a:p>
         </p:txBody>
       </p:sp>
@@ -14245,7 +14315,14 @@
           <a:lstStyle/>
           <a:p>
             <a:pPr algn="ctr"/>
-            <a:endParaRPr lang="en-US"/>
+            <a:r>
+              <a:rPr lang="en-US" sz="3200" b="1" dirty="0">
+                <a:solidFill>
+                  <a:schemeClr val="tx1"/>
+                </a:solidFill>
+              </a:rPr>
+              <a:t>G</a:t>
+            </a:r>
           </a:p>
         </p:txBody>
       </p:sp>
@@ -15853,7 +15930,10 @@
                       <m:sSub>
                         <m:sSubPr>
                           <m:ctrlPr>
-                            <a:rPr lang="en-US" sz="4000" b="1" i="1">
+                            <a:rPr lang="en-US" sz="4000" b="1" i="1" smtClean="0">
+                              <a:solidFill>
+                                <a:srgbClr val="FFC000"/>
+                              </a:solidFill>
                               <a:latin typeface="Cambria Math" panose="02040503050406030204" pitchFamily="18" charset="0"/>
                             </a:rPr>
                           </m:ctrlPr>
@@ -15861,6 +15941,9 @@
                         <m:e>
                           <m:r>
                             <a:rPr lang="en-US" sz="4000" b="1" i="1">
+                              <a:solidFill>
+                                <a:srgbClr val="FFC000"/>
+                              </a:solidFill>
                               <a:latin typeface="Cambria Math" panose="02040503050406030204" pitchFamily="18" charset="0"/>
                             </a:rPr>
                             <m:t>𝑱</m:t>
@@ -15869,6 +15952,9 @@
                         <m:sub>
                           <m:r>
                             <a:rPr lang="en-US" sz="4000" b="1" i="1">
+                              <a:solidFill>
+                                <a:srgbClr val="FFC000"/>
+                              </a:solidFill>
                               <a:latin typeface="Cambria Math" panose="02040503050406030204" pitchFamily="18" charset="0"/>
                             </a:rPr>
                             <m:t>𝟐</m:t>
